--- a/slides/TP557_10_Datasets.pptx
+++ b/slides/TP557_10_Datasets.pptx
@@ -312,7 +312,7 @@
           <a:p>
             <a:fld id="{144F1436-6906-4D93-B7A2-786C327BFA14}" type="datetimeFigureOut">
               <a:rPr lang="nl-BE" smtClean="0"/>
-              <a:t>28/09/2023</a:t>
+              <a:t>5/05/2025</a:t>
             </a:fld>
             <a:endParaRPr lang="nl-BE"/>
           </a:p>
@@ -378,7 +378,7 @@
           <a:p>
             <a:fld id="{F7E56D9B-79AD-444A-AFED-DEC23408F8B4}" type="slidenum">
               <a:rPr lang="nl-BE" smtClean="0"/>
-              <a:t>‹nº›</a:t>
+              <a:t>‹#›</a:t>
             </a:fld>
             <a:endParaRPr lang="nl-BE"/>
           </a:p>
@@ -477,7 +477,7 @@
           <a:p>
             <a:fld id="{AA8CD09E-2914-4F47-B6C1-51B2C31814C9}" type="datetimeFigureOut">
               <a:rPr lang="pt-BR" smtClean="0"/>
-              <a:t>28/09/2023</a:t>
+              <a:t>05/05/2025</a:t>
             </a:fld>
             <a:endParaRPr lang="pt-BR"/>
           </a:p>
@@ -635,7 +635,7 @@
           <a:p>
             <a:fld id="{6FC8D850-966F-45A6-8DE7-15B891E7D40D}" type="slidenum">
               <a:rPr lang="pt-BR" smtClean="0"/>
-              <a:t>‹nº›</a:t>
+              <a:t>‹#›</a:t>
             </a:fld>
             <a:endParaRPr lang="pt-BR"/>
           </a:p>
@@ -3633,7 +3633,7 @@
           <a:p>
             <a:fld id="{63289F7E-B80B-496E-81B4-D396C37C9454}" type="datetimeFigureOut">
               <a:rPr lang="pt-BR" smtClean="0"/>
-              <a:t>28/09/2023</a:t>
+              <a:t>05/05/2025</a:t>
             </a:fld>
             <a:endParaRPr lang="pt-BR"/>
           </a:p>
@@ -3687,7 +3687,7 @@
           <a:p>
             <a:fld id="{1A7E88B7-70CE-4035-AE73-13FA6FB985D4}" type="slidenum">
               <a:rPr lang="pt-BR" smtClean="0"/>
-              <a:t>‹nº›</a:t>
+              <a:t>‹#›</a:t>
             </a:fld>
             <a:endParaRPr lang="pt-BR"/>
           </a:p>
@@ -3831,7 +3831,7 @@
           <a:p>
             <a:fld id="{63289F7E-B80B-496E-81B4-D396C37C9454}" type="datetimeFigureOut">
               <a:rPr lang="pt-BR" smtClean="0"/>
-              <a:t>28/09/2023</a:t>
+              <a:t>05/05/2025</a:t>
             </a:fld>
             <a:endParaRPr lang="pt-BR"/>
           </a:p>
@@ -3885,7 +3885,7 @@
           <a:p>
             <a:fld id="{1A7E88B7-70CE-4035-AE73-13FA6FB985D4}" type="slidenum">
               <a:rPr lang="pt-BR" smtClean="0"/>
-              <a:t>‹nº›</a:t>
+              <a:t>‹#›</a:t>
             </a:fld>
             <a:endParaRPr lang="pt-BR"/>
           </a:p>
@@ -4039,7 +4039,7 @@
           <a:p>
             <a:fld id="{63289F7E-B80B-496E-81B4-D396C37C9454}" type="datetimeFigureOut">
               <a:rPr lang="pt-BR" smtClean="0"/>
-              <a:t>28/09/2023</a:t>
+              <a:t>05/05/2025</a:t>
             </a:fld>
             <a:endParaRPr lang="pt-BR"/>
           </a:p>
@@ -4093,7 +4093,7 @@
           <a:p>
             <a:fld id="{1A7E88B7-70CE-4035-AE73-13FA6FB985D4}" type="slidenum">
               <a:rPr lang="pt-BR" smtClean="0"/>
-              <a:t>‹nº›</a:t>
+              <a:t>‹#›</a:t>
             </a:fld>
             <a:endParaRPr lang="pt-BR"/>
           </a:p>
@@ -4237,7 +4237,7 @@
           <a:p>
             <a:fld id="{63289F7E-B80B-496E-81B4-D396C37C9454}" type="datetimeFigureOut">
               <a:rPr lang="pt-BR" smtClean="0"/>
-              <a:t>28/09/2023</a:t>
+              <a:t>05/05/2025</a:t>
             </a:fld>
             <a:endParaRPr lang="pt-BR"/>
           </a:p>
@@ -4291,7 +4291,7 @@
           <a:p>
             <a:fld id="{1A7E88B7-70CE-4035-AE73-13FA6FB985D4}" type="slidenum">
               <a:rPr lang="pt-BR" smtClean="0"/>
-              <a:t>‹nº›</a:t>
+              <a:t>‹#›</a:t>
             </a:fld>
             <a:endParaRPr lang="pt-BR"/>
           </a:p>
@@ -4512,7 +4512,7 @@
           <a:p>
             <a:fld id="{63289F7E-B80B-496E-81B4-D396C37C9454}" type="datetimeFigureOut">
               <a:rPr lang="pt-BR" smtClean="0"/>
-              <a:t>28/09/2023</a:t>
+              <a:t>05/05/2025</a:t>
             </a:fld>
             <a:endParaRPr lang="pt-BR"/>
           </a:p>
@@ -4566,7 +4566,7 @@
           <a:p>
             <a:fld id="{1A7E88B7-70CE-4035-AE73-13FA6FB985D4}" type="slidenum">
               <a:rPr lang="pt-BR" smtClean="0"/>
-              <a:t>‹nº›</a:t>
+              <a:t>‹#›</a:t>
             </a:fld>
             <a:endParaRPr lang="pt-BR"/>
           </a:p>
@@ -4777,7 +4777,7 @@
           <a:p>
             <a:fld id="{63289F7E-B80B-496E-81B4-D396C37C9454}" type="datetimeFigureOut">
               <a:rPr lang="pt-BR" smtClean="0"/>
-              <a:t>28/09/2023</a:t>
+              <a:t>05/05/2025</a:t>
             </a:fld>
             <a:endParaRPr lang="pt-BR"/>
           </a:p>
@@ -4831,7 +4831,7 @@
           <a:p>
             <a:fld id="{1A7E88B7-70CE-4035-AE73-13FA6FB985D4}" type="slidenum">
               <a:rPr lang="pt-BR" smtClean="0"/>
-              <a:t>‹nº›</a:t>
+              <a:t>‹#›</a:t>
             </a:fld>
             <a:endParaRPr lang="pt-BR"/>
           </a:p>
@@ -5189,7 +5189,7 @@
           <a:p>
             <a:fld id="{63289F7E-B80B-496E-81B4-D396C37C9454}" type="datetimeFigureOut">
               <a:rPr lang="pt-BR" smtClean="0"/>
-              <a:t>28/09/2023</a:t>
+              <a:t>05/05/2025</a:t>
             </a:fld>
             <a:endParaRPr lang="pt-BR"/>
           </a:p>
@@ -5243,7 +5243,7 @@
           <a:p>
             <a:fld id="{1A7E88B7-70CE-4035-AE73-13FA6FB985D4}" type="slidenum">
               <a:rPr lang="pt-BR" smtClean="0"/>
-              <a:t>‹nº›</a:t>
+              <a:t>‹#›</a:t>
             </a:fld>
             <a:endParaRPr lang="pt-BR"/>
           </a:p>
@@ -5330,7 +5330,7 @@
           <a:p>
             <a:fld id="{63289F7E-B80B-496E-81B4-D396C37C9454}" type="datetimeFigureOut">
               <a:rPr lang="pt-BR" smtClean="0"/>
-              <a:t>28/09/2023</a:t>
+              <a:t>05/05/2025</a:t>
             </a:fld>
             <a:endParaRPr lang="pt-BR"/>
           </a:p>
@@ -5384,7 +5384,7 @@
           <a:p>
             <a:fld id="{1A7E88B7-70CE-4035-AE73-13FA6FB985D4}" type="slidenum">
               <a:rPr lang="pt-BR" smtClean="0"/>
-              <a:t>‹nº›</a:t>
+              <a:t>‹#›</a:t>
             </a:fld>
             <a:endParaRPr lang="pt-BR"/>
           </a:p>
@@ -5443,7 +5443,7 @@
           <a:p>
             <a:fld id="{63289F7E-B80B-496E-81B4-D396C37C9454}" type="datetimeFigureOut">
               <a:rPr lang="pt-BR" smtClean="0"/>
-              <a:t>28/09/2023</a:t>
+              <a:t>05/05/2025</a:t>
             </a:fld>
             <a:endParaRPr lang="pt-BR"/>
           </a:p>
@@ -5497,7 +5497,7 @@
           <a:p>
             <a:fld id="{1A7E88B7-70CE-4035-AE73-13FA6FB985D4}" type="slidenum">
               <a:rPr lang="pt-BR" smtClean="0"/>
-              <a:t>‹nº›</a:t>
+              <a:t>‹#›</a:t>
             </a:fld>
             <a:endParaRPr lang="pt-BR"/>
           </a:p>
@@ -5754,7 +5754,7 @@
           <a:p>
             <a:fld id="{63289F7E-B80B-496E-81B4-D396C37C9454}" type="datetimeFigureOut">
               <a:rPr lang="pt-BR" smtClean="0"/>
-              <a:t>28/09/2023</a:t>
+              <a:t>05/05/2025</a:t>
             </a:fld>
             <a:endParaRPr lang="pt-BR"/>
           </a:p>
@@ -5808,7 +5808,7 @@
           <a:p>
             <a:fld id="{1A7E88B7-70CE-4035-AE73-13FA6FB985D4}" type="slidenum">
               <a:rPr lang="pt-BR" smtClean="0"/>
-              <a:t>‹nº›</a:t>
+              <a:t>‹#›</a:t>
             </a:fld>
             <a:endParaRPr lang="pt-BR"/>
           </a:p>
@@ -6042,7 +6042,7 @@
           <a:p>
             <a:fld id="{63289F7E-B80B-496E-81B4-D396C37C9454}" type="datetimeFigureOut">
               <a:rPr lang="pt-BR" smtClean="0"/>
-              <a:t>28/09/2023</a:t>
+              <a:t>05/05/2025</a:t>
             </a:fld>
             <a:endParaRPr lang="pt-BR"/>
           </a:p>
@@ -6096,7 +6096,7 @@
           <a:p>
             <a:fld id="{1A7E88B7-70CE-4035-AE73-13FA6FB985D4}" type="slidenum">
               <a:rPr lang="pt-BR" smtClean="0"/>
-              <a:t>‹nº›</a:t>
+              <a:t>‹#›</a:t>
             </a:fld>
             <a:endParaRPr lang="pt-BR"/>
           </a:p>
@@ -6283,7 +6283,7 @@
           <a:p>
             <a:fld id="{63289F7E-B80B-496E-81B4-D396C37C9454}" type="datetimeFigureOut">
               <a:rPr lang="pt-BR" smtClean="0"/>
-              <a:t>28/09/2023</a:t>
+              <a:t>05/05/2025</a:t>
             </a:fld>
             <a:endParaRPr lang="pt-BR"/>
           </a:p>
@@ -6373,7 +6373,7 @@
           <a:p>
             <a:fld id="{1A7E88B7-70CE-4035-AE73-13FA6FB985D4}" type="slidenum">
               <a:rPr lang="pt-BR" smtClean="0"/>
-              <a:t>‹nº›</a:t>
+              <a:t>‹#›</a:t>
             </a:fld>
             <a:endParaRPr lang="pt-BR"/>
           </a:p>
@@ -7069,7 +7069,7 @@
             <a:r>
               <a:rPr lang="pt-BR" b="1" i="1" dirty="0">
                 <a:solidFill>
-                  <a:srgbClr val="00B050"/>
+                  <a:schemeClr val="accent2"/>
                 </a:solidFill>
                 <a:effectLst/>
               </a:rPr>
@@ -10242,17 +10242,17 @@
               <a:rPr lang="pt-BR" b="1" i="1" dirty="0">
                 <a:effectLst/>
               </a:rPr>
-              <a:t>early-stop</a:t>
+              <a:t>early-stopping</a:t>
             </a:r>
             <a:r>
               <a:rPr lang="pt-BR" b="0" i="0" dirty="0">
                 <a:effectLst/>
               </a:rPr>
-              <a:t> (</a:t>
+              <a:t>, o qual </a:t>
             </a:r>
             <a:r>
               <a:rPr lang="pt-BR" dirty="0"/>
-              <a:t>termina o treinamento quando o modelo começa sobreajustar</a:t>
+              <a:t>encerra o treinamento quando o modelo começa sobreajustar</a:t>
             </a:r>
             <a:r>
               <a:rPr lang="pt-BR" b="0" i="0" dirty="0">
@@ -12371,7 +12371,7 @@
                   <a:srgbClr val="00B050"/>
                 </a:solidFill>
               </a:rPr>
-              <a:t>desempenho do modelo em dados inéditos e ajustar hiperparâmetros</a:t>
+              <a:t>desempenho do modelo em dados inéditos e ajustar hiperparâmetros*</a:t>
             </a:r>
             <a:r>
               <a:rPr lang="pt-BR" dirty="0"/>
@@ -12640,7 +12640,7 @@
               <a:rPr lang="pt-BR" sz="1200" b="1" i="0" dirty="0">
                 <a:effectLst/>
               </a:rPr>
-              <a:t>Hiperparâmetros</a:t>
+              <a:t>*Hiperparâmetros</a:t>
             </a:r>
             <a:r>
               <a:rPr lang="pt-BR" sz="1200" b="0" i="0" dirty="0">
@@ -14448,6 +14448,58 @@
           </a:prstGeom>
         </p:spPr>
       </p:pic>
+      <p:sp>
+        <p:nvSpPr>
+          <p:cNvPr id="3" name="Rectangle 2">
+            <a:extLst>
+              <a:ext uri="{FF2B5EF4-FFF2-40B4-BE49-F238E27FC236}">
+                <a16:creationId xmlns:a16="http://schemas.microsoft.com/office/drawing/2014/main" id="{C0399FB7-57F2-9ED2-F370-FD4C5DAC7CDD}"/>
+              </a:ext>
+            </a:extLst>
+          </p:cNvPr>
+          <p:cNvSpPr/>
+          <p:nvPr/>
+        </p:nvSpPr>
+        <p:spPr>
+          <a:xfrm>
+            <a:off x="1776248" y="3367549"/>
+            <a:ext cx="4466897" cy="504423"/>
+          </a:xfrm>
+          <a:prstGeom prst="rect">
+            <a:avLst/>
+          </a:prstGeom>
+          <a:noFill/>
+          <a:ln w="38100">
+            <a:solidFill>
+              <a:srgbClr val="FF0000"/>
+            </a:solidFill>
+          </a:ln>
+        </p:spPr>
+        <p:style>
+          <a:lnRef idx="2">
+            <a:schemeClr val="accent1">
+              <a:shade val="15000"/>
+            </a:schemeClr>
+          </a:lnRef>
+          <a:fillRef idx="1">
+            <a:schemeClr val="accent1"/>
+          </a:fillRef>
+          <a:effectRef idx="0">
+            <a:schemeClr val="accent1"/>
+          </a:effectRef>
+          <a:fontRef idx="minor">
+            <a:schemeClr val="lt1"/>
+          </a:fontRef>
+        </p:style>
+        <p:txBody>
+          <a:bodyPr rtlCol="0" anchor="ctr"/>
+          <a:lstStyle/>
+          <a:p>
+            <a:pPr algn="ctr"/>
+            <a:endParaRPr lang="en-US"/>
+          </a:p>
+        </p:txBody>
+      </p:sp>
     </p:spTree>
     <p:extLst>
       <p:ext uri="{BB962C8B-B14F-4D97-AF65-F5344CB8AC3E}">
@@ -14559,10 +14611,18 @@
             <a:r>
               <a:rPr lang="pt-BR" b="1" i="1" dirty="0">
                 <a:solidFill>
+                  <a:schemeClr val="accent2"/>
+                </a:solidFill>
+              </a:rPr>
+              <a:t>ambos os erros </a:t>
+            </a:r>
+            <a:r>
+              <a:rPr lang="pt-BR" b="1" i="1" dirty="0">
+                <a:solidFill>
                   <a:srgbClr val="00B050"/>
                 </a:solidFill>
               </a:rPr>
-              <a:t>ambos os erros são altos</a:t>
+              <a:t>são altos</a:t>
             </a:r>
             <a:r>
               <a:rPr lang="pt-BR" dirty="0"/>
@@ -14855,11 +14915,19 @@
                   <a:srgbClr val="00B050"/>
                 </a:solidFill>
               </a:rPr>
-              <a:t>ensinar alguém que nunca viu um calçado antes sobre o que eles realmente são</a:t>
+              <a:t>ensinar alguém que nunca viu um calçado antes sobre o </a:t>
+            </a:r>
+            <a:r>
+              <a:rPr lang="pt-BR" b="1" i="1" dirty="0">
+                <a:solidFill>
+                  <a:schemeClr val="accent2"/>
+                </a:solidFill>
+              </a:rPr>
+              <a:t>que eles realmente são</a:t>
             </a:r>
             <a:r>
               <a:rPr lang="pt-BR" dirty="0"/>
-              <a:t> para que no futuro quando essa pessoa ver um objeto ela poder decidir se ele é um calçado ou não.</a:t>
+              <a:t> para que no futuro quando essa pessoa ver um objeto destes, ela possa decidir se ele é um calçado ou não.</a:t>
             </a:r>
           </a:p>
         </p:txBody>
@@ -15533,7 +15601,7 @@
             <a:r>
               <a:rPr lang="pt-BR" b="1" i="1" dirty="0">
                 <a:solidFill>
-                  <a:srgbClr val="00B050"/>
+                  <a:schemeClr val="accent2"/>
                 </a:solidFill>
               </a:rPr>
               <a:t>balanço entre complexidade e capacidade de generalização</a:t>
@@ -15824,7 +15892,7 @@
                   <a:srgbClr val="00B050"/>
                 </a:solidFill>
               </a:rPr>
-              <a:t>early stopping</a:t>
+              <a:t>early-stopping</a:t>
             </a:r>
             <a:r>
               <a:rPr lang="pt-BR" dirty="0"/>
@@ -23040,7 +23108,23 @@
                   <a:srgbClr val="00B050"/>
                 </a:solidFill>
               </a:rPr>
-              <a:t>100% de acurácia no reconhecimento dos tipos de calçados nos quais treinamos a rede.</a:t>
+              <a:t>100% de acurácia no reconhecimento dos tipos de calçados </a:t>
+            </a:r>
+            <a:r>
+              <a:rPr lang="pt-BR" b="1" i="1" dirty="0">
+                <a:solidFill>
+                  <a:schemeClr val="accent2"/>
+                </a:solidFill>
+              </a:rPr>
+              <a:t>nos quais treinamos a rede</a:t>
+            </a:r>
+            <a:r>
+              <a:rPr lang="pt-BR" b="1" i="1" dirty="0">
+                <a:solidFill>
+                  <a:srgbClr val="00B050"/>
+                </a:solidFill>
+              </a:rPr>
+              <a:t>.</a:t>
             </a:r>
             <a:endParaRPr lang="pt-BR" dirty="0"/>
           </a:p>
@@ -23309,7 +23393,7 @@
             <a:r>
               <a:rPr lang="pt-BR" b="1" i="1" dirty="0">
                 <a:solidFill>
-                  <a:srgbClr val="00B050"/>
+                  <a:srgbClr val="7030A0"/>
                 </a:solidFill>
               </a:rPr>
               <a:t>generalizar</a:t>
